--- a/VillariWilliam1000045058.pptx
+++ b/VillariWilliam1000045058.pptx
@@ -498,7 +498,7 @@
           <a:p>
             <a:fld id="{D9A03290-C39D-45B6-9EA8-560DDA0656D7}" type="datetimeFigureOut">
               <a:rPr lang="it-IT" smtClean="0"/>
-              <a:t>09/07/26</a:t>
+              <a:t>16/07/2026</a:t>
             </a:fld>
             <a:endParaRPr lang="it-IT"/>
           </a:p>
@@ -656,7 +656,7 @@
           <a:p>
             <a:fld id="{D16CFFA4-1ED0-45A1-A0B5-5E99393A0C12}" type="slidenum">
               <a:rPr lang="it-IT" smtClean="0"/>
-              <a:t>‹N›</a:t>
+              <a:t>‹#›</a:t>
             </a:fld>
             <a:endParaRPr lang="it-IT"/>
           </a:p>
@@ -10055,17 +10055,21 @@
           <a:lstStyle/>
           <a:p>
             <a:r>
-              <a:rPr lang="it-IT" sz="2800" dirty="0"/>
+              <a:rPr lang="it-IT" sz="4000" dirty="0"/>
               <a:t>Riconoscimento automatico di risse in sequenze video</a:t>
             </a:r>
             <a:br>
-              <a:rPr lang="it-IT" sz="2800" dirty="0"/>
+              <a:rPr lang="it-IT" sz="4000" dirty="0"/>
             </a:br>
             <a:r>
-              <a:rPr lang="it-IT" sz="2800" dirty="0"/>
-              <a:t>mediante tecniche di computer vision e deep learning</a:t>
-            </a:r>
-            <a:endParaRPr lang="it-IT" sz="2800" dirty="0">
+              <a:rPr lang="it-IT" sz="4000" dirty="0"/>
+              <a:t>mediante tecniche di Computer Vision e </a:t>
+            </a:r>
+            <a:r>
+              <a:rPr lang="it-IT" sz="4000"/>
+              <a:t>Deep Learning</a:t>
+            </a:r>
+            <a:endParaRPr lang="it-IT" sz="4000" dirty="0">
               <a:solidFill>
                 <a:schemeClr val="tx1"/>
               </a:solidFill>
@@ -10089,9 +10093,16 @@
             <p:ph type="subTitle" idx="1"/>
           </p:nvPr>
         </p:nvSpPr>
-        <p:spPr/>
+        <p:spPr>
+          <a:xfrm>
+            <a:off x="1524000" y="3602039"/>
+            <a:ext cx="9144000" cy="630749"/>
+          </a:xfrm>
+        </p:spPr>
         <p:txBody>
-          <a:bodyPr/>
+          <a:bodyPr>
+            <a:noAutofit/>
+          </a:bodyPr>
           <a:lstStyle/>
           <a:p>
             <a:r>
@@ -10117,53 +10128,57 @@
             <p:ph type="body" sz="quarter" idx="10"/>
           </p:nvPr>
         </p:nvSpPr>
-        <p:spPr/>
+        <p:spPr>
+          <a:xfrm>
+            <a:off x="1524000" y="3943959"/>
+            <a:ext cx="9144000" cy="1502850"/>
+          </a:xfrm>
+        </p:spPr>
         <p:txBody>
           <a:bodyPr>
-            <a:normAutofit fontScale="25000" lnSpcReduction="20000"/>
+            <a:noAutofit/>
           </a:bodyPr>
           <a:lstStyle/>
           <a:p>
-            <a:endParaRPr lang="it-IT" sz="1200" dirty="0"/>
-          </a:p>
-          <a:p>
-            <a:r>
-              <a:rPr lang="it-IT" sz="7200" dirty="0"/>
-              <a:t>Relatrice: Prof.ssa Roberta Avanzato</a:t>
-            </a:r>
-          </a:p>
-          <a:p>
-            <a:r>
-              <a:rPr lang="it-IT" sz="6400" dirty="0"/>
-              <a:t>Correlatore: Prof. Francesco </a:t>
-            </a:r>
-            <a:r>
-              <a:rPr lang="it-IT" sz="6400" dirty="0" err="1"/>
-              <a:t>Beritelli</a:t>
-            </a:r>
-            <a:r>
-              <a:rPr lang="it-IT" sz="6400" dirty="0"/>
-              <a:t> </a:t>
-            </a:r>
-          </a:p>
-          <a:p>
-            <a:r>
-              <a:rPr lang="it-IT" sz="6400" dirty="0"/>
-              <a:t>Correlatrice: Ing. Ludovica </a:t>
-            </a:r>
-            <a:r>
-              <a:rPr lang="it-IT" sz="6400" dirty="0" err="1"/>
-              <a:t>Beritelli</a:t>
-            </a:r>
-            <a:endParaRPr lang="it-IT" sz="6400" dirty="0"/>
-          </a:p>
-          <a:p>
             <a:endParaRPr lang="it-IT" sz="1600" dirty="0"/>
           </a:p>
           <a:p>
             <a:r>
-              <a:rPr lang="it-IT" sz="6400" dirty="0"/>
-              <a:t>27/07/2026</a:t>
+              <a:rPr lang="it-IT" sz="1600" dirty="0"/>
+              <a:t>Relatrice: Prof.ssa </a:t>
+            </a:r>
+            <a:r>
+              <a:rPr lang="it-IT" sz="1600" b="1" dirty="0"/>
+              <a:t>Roberta Avanzato</a:t>
+            </a:r>
+          </a:p>
+          <a:p>
+            <a:r>
+              <a:rPr lang="it-IT" sz="1600" dirty="0"/>
+              <a:t>Correlatore: Prof. </a:t>
+            </a:r>
+            <a:r>
+              <a:rPr lang="it-IT" sz="1600" b="1" dirty="0"/>
+              <a:t>Francesco Beritelli</a:t>
+            </a:r>
+          </a:p>
+          <a:p>
+            <a:r>
+              <a:rPr lang="it-IT" sz="1600" dirty="0"/>
+              <a:t>Correlatrice: Ing. </a:t>
+            </a:r>
+            <a:r>
+              <a:rPr lang="it-IT" sz="1600" b="1" dirty="0"/>
+              <a:t>Ludovica Beritelli</a:t>
+            </a:r>
+          </a:p>
+          <a:p>
+            <a:endParaRPr lang="it-IT" sz="1600" dirty="0"/>
+          </a:p>
+          <a:p>
+            <a:r>
+              <a:rPr lang="it-IT" sz="1600" dirty="0"/>
+              <a:t>27 Luglio 2026</a:t>
             </a:r>
           </a:p>
         </p:txBody>
@@ -10216,7 +10231,9 @@
         </p:nvSpPr>
         <p:spPr/>
         <p:txBody>
-          <a:bodyPr/>
+          <a:bodyPr>
+            <a:noAutofit/>
+          </a:bodyPr>
           <a:lstStyle/>
           <a:p>
             <a:r>
@@ -10244,13 +10261,13 @@
         </p:nvSpPr>
         <p:spPr>
           <a:xfrm>
-            <a:off x="838201" y="1825625"/>
-            <a:ext cx="5257800" cy="4017614"/>
+            <a:off x="838200" y="1496948"/>
+            <a:ext cx="6136179" cy="4540032"/>
           </a:xfrm>
         </p:spPr>
         <p:txBody>
           <a:bodyPr>
-            <a:normAutofit fontScale="92500" lnSpcReduction="10000"/>
+            <a:noAutofit/>
           </a:bodyPr>
           <a:lstStyle/>
           <a:p>
@@ -10260,19 +10277,19 @@
               </a:lnSpc>
             </a:pPr>
             <a:r>
-              <a:rPr lang="it-IT" sz="2400" b="1" dirty="0"/>
+              <a:rPr lang="it-IT" sz="2200" b="1" dirty="0"/>
               <a:t>Contesto</a:t>
             </a:r>
             <a:r>
-              <a:rPr lang="it-IT" sz="2400" dirty="0"/>
+              <a:rPr lang="it-IT" sz="2200" dirty="0"/>
               <a:t>: Videosorveglianza </a:t>
             </a:r>
             <a:r>
-              <a:rPr lang="it-IT" sz="2400" i="1" dirty="0"/>
+              <a:rPr lang="it-IT" sz="2200" i="1" dirty="0"/>
               <a:t>Smart City </a:t>
             </a:r>
             <a:r>
-              <a:rPr lang="it-IT" sz="2400" dirty="0"/>
+              <a:rPr lang="it-IT" sz="2200" dirty="0"/>
               <a:t>dovuto ai limiti della supervisione umana</a:t>
             </a:r>
           </a:p>
@@ -10283,7 +10300,7 @@
               </a:lnSpc>
               <a:buNone/>
             </a:pPr>
-            <a:endParaRPr lang="it-IT" dirty="0"/>
+            <a:endParaRPr lang="it-IT" sz="2200" dirty="0"/>
           </a:p>
           <a:p>
             <a:pPr>
@@ -10292,17 +10309,26 @@
               </a:lnSpc>
             </a:pPr>
             <a:r>
-              <a:rPr lang="it-IT" sz="2400" b="1" dirty="0"/>
+              <a:rPr lang="it-IT" sz="2200" b="1" dirty="0"/>
               <a:t>Obiettivo</a:t>
             </a:r>
             <a:r>
-              <a:rPr lang="it-IT" sz="2400" dirty="0"/>
+              <a:rPr lang="it-IT" sz="2200" dirty="0"/>
               <a:t>: Sistema automatico di rilevamento risse ottimizzato per </a:t>
             </a:r>
             <a:r>
-              <a:rPr lang="it-IT" sz="2400" i="1" dirty="0"/>
+              <a:rPr lang="it-IT" sz="2200" i="1" dirty="0"/>
               <a:t>Edge devices</a:t>
             </a:r>
+          </a:p>
+          <a:p>
+            <a:pPr marL="0" indent="0">
+              <a:lnSpc>
+                <a:spcPct val="100000"/>
+              </a:lnSpc>
+              <a:buNone/>
+            </a:pPr>
+            <a:endParaRPr lang="it-IT" sz="2200" dirty="0"/>
           </a:p>
           <a:p>
             <a:pPr>
@@ -10310,52 +10336,44 @@
                 <a:spcPct val="100000"/>
               </a:lnSpc>
             </a:pPr>
-            <a:endParaRPr lang="it-IT" sz="2400" dirty="0"/>
-          </a:p>
-          <a:p>
-            <a:pPr>
-              <a:lnSpc>
-                <a:spcPct val="100000"/>
-              </a:lnSpc>
-            </a:pPr>
-            <a:r>
-              <a:rPr lang="it-IT" sz="2400" b="1" dirty="0"/>
+            <a:r>
+              <a:rPr lang="it-IT" sz="2200" b="1" dirty="0"/>
               <a:t>Dataset</a:t>
             </a:r>
             <a:r>
-              <a:rPr lang="it-IT" sz="2400" dirty="0"/>
+              <a:rPr lang="it-IT" sz="2200" dirty="0"/>
               <a:t>: </a:t>
             </a:r>
             <a:r>
-              <a:rPr lang="it-IT" sz="2400" i="1" dirty="0"/>
+              <a:rPr lang="it-IT" sz="2200" i="1" dirty="0"/>
               <a:t>RWF-2000</a:t>
             </a:r>
             <a:r>
-              <a:rPr lang="it-IT" sz="2400" dirty="0"/>
+              <a:rPr lang="it-IT" sz="2200" dirty="0"/>
               <a:t> + </a:t>
             </a:r>
             <a:r>
-              <a:rPr lang="it-IT" sz="2400" i="1" dirty="0"/>
+              <a:rPr lang="it-IT" sz="2200" i="1" dirty="0"/>
               <a:t>Real Life </a:t>
             </a:r>
             <a:r>
-              <a:rPr lang="it-IT" sz="2400" i="1" dirty="0" err="1"/>
+              <a:rPr lang="it-IT" sz="2200" i="1" dirty="0" err="1"/>
               <a:t>Violence</a:t>
             </a:r>
             <a:r>
-              <a:rPr lang="it-IT" sz="2400" i="1" dirty="0"/>
+              <a:rPr lang="it-IT" sz="2200" i="1" dirty="0"/>
               <a:t> Situations </a:t>
             </a:r>
             <a:r>
-              <a:rPr lang="it-IT" sz="2400" dirty="0"/>
+              <a:rPr lang="it-IT" sz="2200" dirty="0"/>
               <a:t>(training/val), </a:t>
             </a:r>
             <a:r>
-              <a:rPr lang="it-IT" sz="2400" i="1" dirty="0"/>
+              <a:rPr lang="it-IT" sz="2200" i="1" dirty="0"/>
               <a:t>UCF-Crime</a:t>
             </a:r>
             <a:r>
-              <a:rPr lang="it-IT" sz="2400" dirty="0"/>
+              <a:rPr lang="it-IT" sz="2200" dirty="0"/>
               <a:t> (test) </a:t>
             </a:r>
           </a:p>
@@ -10445,7 +10463,9 @@
         </p:nvSpPr>
         <p:spPr/>
         <p:txBody>
-          <a:bodyPr/>
+          <a:bodyPr>
+            <a:noAutofit/>
+          </a:bodyPr>
           <a:lstStyle/>
           <a:p>
             <a:r>
@@ -10473,13 +10493,13 @@
         </p:nvSpPr>
         <p:spPr>
           <a:xfrm>
-            <a:off x="838200" y="1825625"/>
-            <a:ext cx="5830614" cy="4017614"/>
+            <a:off x="838200" y="1702205"/>
+            <a:ext cx="6759010" cy="4458797"/>
           </a:xfrm>
         </p:spPr>
         <p:txBody>
           <a:bodyPr>
-            <a:normAutofit fontScale="85000" lnSpcReduction="20000"/>
+            <a:noAutofit/>
           </a:bodyPr>
           <a:lstStyle/>
           <a:p>
@@ -10489,19 +10509,19 @@
               </a:lnSpc>
             </a:pPr>
             <a:r>
-              <a:rPr lang="it-IT" b="1" dirty="0"/>
+              <a:rPr lang="it-IT" sz="2200" b="1" dirty="0"/>
               <a:t>Accuratezza</a:t>
             </a:r>
             <a:r>
-              <a:rPr lang="it-IT" dirty="0"/>
+              <a:rPr lang="it-IT" sz="2200" dirty="0"/>
               <a:t>: 84% (validazione), 85% (</a:t>
             </a:r>
             <a:r>
-              <a:rPr lang="it-IT" i="1" dirty="0"/>
+              <a:rPr lang="it-IT" sz="2200" i="1" dirty="0"/>
               <a:t>UCF-Crime</a:t>
             </a:r>
             <a:r>
-              <a:rPr lang="it-IT" dirty="0"/>
+              <a:rPr lang="it-IT" sz="2200" dirty="0"/>
               <a:t>)</a:t>
             </a:r>
           </a:p>
@@ -10511,7 +10531,7 @@
                 <a:spcPct val="100000"/>
               </a:lnSpc>
             </a:pPr>
-            <a:endParaRPr lang="it-IT" dirty="0"/>
+            <a:endParaRPr lang="it-IT" sz="2200" dirty="0"/>
           </a:p>
           <a:p>
             <a:pPr>
@@ -10520,11 +10540,11 @@
               </a:lnSpc>
             </a:pPr>
             <a:r>
-              <a:rPr lang="it-IT" b="1" dirty="0"/>
+              <a:rPr lang="it-IT" sz="2200" b="1" dirty="0"/>
               <a:t>Filtro spettatori</a:t>
             </a:r>
             <a:r>
-              <a:rPr lang="it-IT" dirty="0"/>
+              <a:rPr lang="it-IT" sz="2200" dirty="0"/>
               <a:t>: FP 1306 → 434</a:t>
             </a:r>
           </a:p>
@@ -10534,7 +10554,7 @@
                 <a:spcPct val="100000"/>
               </a:lnSpc>
             </a:pPr>
-            <a:endParaRPr lang="it-IT" dirty="0"/>
+            <a:endParaRPr lang="it-IT" sz="2200" dirty="0"/>
           </a:p>
           <a:p>
             <a:pPr>
@@ -10543,15 +10563,15 @@
               </a:lnSpc>
             </a:pPr>
             <a:r>
-              <a:rPr lang="it-IT" b="1" dirty="0"/>
+              <a:rPr lang="it-IT" sz="2200" b="1" dirty="0"/>
               <a:t>Modello</a:t>
             </a:r>
             <a:r>
-              <a:rPr lang="it-IT" dirty="0"/>
+              <a:rPr lang="it-IT" sz="2200" dirty="0"/>
               <a:t>: 154k parametri, 56.8 </a:t>
             </a:r>
             <a:r>
-              <a:rPr lang="it-IT" i="1" dirty="0"/>
+              <a:rPr lang="it-IT" sz="2200" i="1" dirty="0"/>
               <a:t>FPS</a:t>
             </a:r>
           </a:p>
@@ -10561,7 +10581,7 @@
                 <a:spcPct val="100000"/>
               </a:lnSpc>
             </a:pPr>
-            <a:endParaRPr lang="it-IT" dirty="0"/>
+            <a:endParaRPr lang="it-IT" sz="2200" dirty="0"/>
           </a:p>
           <a:p>
             <a:pPr>
@@ -10570,19 +10590,19 @@
               </a:lnSpc>
             </a:pPr>
             <a:r>
-              <a:rPr lang="it-IT" b="1" dirty="0"/>
+              <a:rPr lang="it-IT" sz="2200" b="1" dirty="0"/>
               <a:t>Sviluppo futuro</a:t>
             </a:r>
             <a:r>
-              <a:rPr lang="it-IT" dirty="0"/>
+              <a:rPr lang="it-IT" sz="2200" dirty="0"/>
               <a:t>: </a:t>
             </a:r>
             <a:r>
-              <a:rPr lang="it-IT" i="1" dirty="0"/>
+              <a:rPr lang="it-IT" sz="2200" i="1" dirty="0"/>
               <a:t>GCN</a:t>
             </a:r>
             <a:r>
-              <a:rPr lang="it-IT" dirty="0"/>
+              <a:rPr lang="it-IT" sz="2200" dirty="0"/>
               <a:t> multi-persona</a:t>
             </a:r>
           </a:p>
@@ -10616,8 +10636,8 @@
         </p:blipFill>
         <p:spPr>
           <a:xfrm>
-            <a:off x="6822785" y="479247"/>
-            <a:ext cx="4969820" cy="2692756"/>
+            <a:off x="7597212" y="365125"/>
+            <a:ext cx="3420965" cy="1660456"/>
           </a:xfrm>
           <a:prstGeom prst="rect">
             <a:avLst/>
@@ -10652,8 +10672,44 @@
         </p:blipFill>
         <p:spPr>
           <a:xfrm>
-            <a:off x="6822786" y="3286125"/>
-            <a:ext cx="4969819" cy="2698640"/>
+            <a:off x="7597210" y="2115956"/>
+            <a:ext cx="3420964" cy="1857603"/>
+          </a:xfrm>
+          <a:prstGeom prst="rect">
+            <a:avLst/>
+          </a:prstGeom>
+        </p:spPr>
+      </p:pic>
+      <p:pic>
+        <p:nvPicPr>
+          <p:cNvPr id="3" name="Picture 2">
+            <a:extLst>
+              <a:ext uri="{FF2B5EF4-FFF2-40B4-BE49-F238E27FC236}">
+                <a16:creationId xmlns:a16="http://schemas.microsoft.com/office/drawing/2014/main" id="{84033708-F0DC-F836-D7E8-F8B7AF5D2793}"/>
+              </a:ext>
+            </a:extLst>
+          </p:cNvPr>
+          <p:cNvPicPr>
+            <a:picLocks noChangeAspect="1"/>
+          </p:cNvPicPr>
+          <p:nvPr/>
+        </p:nvPicPr>
+        <p:blipFill>
+          <a:blip r:embed="rId5">
+            <a:extLst>
+              <a:ext uri="{28A0092B-C50C-407E-A947-70E740481C1C}">
+                <a14:useLocalDpi xmlns:a14="http://schemas.microsoft.com/office/drawing/2010/main" val="0"/>
+              </a:ext>
+            </a:extLst>
+          </a:blip>
+          <a:stretch>
+            <a:fillRect/>
+          </a:stretch>
+        </p:blipFill>
+        <p:spPr>
+          <a:xfrm>
+            <a:off x="8018471" y="4072413"/>
+            <a:ext cx="2578443" cy="2148703"/>
           </a:xfrm>
           <a:prstGeom prst="rect">
             <a:avLst/>
@@ -11860,15 +11916,6 @@
 </file>
 
 <file path=customXml/item2.xml><?xml version="1.0" encoding="utf-8"?>
-<?mso-contentType ?>
-<FormTemplates xmlns="http://schemas.microsoft.com/sharepoint/v3/contenttype/forms">
-  <Display>DocumentLibraryForm</Display>
-  <Edit>DocumentLibraryForm</Edit>
-  <New>DocumentLibraryForm</New>
-</FormTemplates>
-</file>
-
-<file path=customXml/item3.xml><?xml version="1.0" encoding="utf-8"?>
 <ct:contentTypeSchema xmlns:ct="http://schemas.microsoft.com/office/2006/metadata/contentType" xmlns:ma="http://schemas.microsoft.com/office/2006/metadata/properties/metaAttributes" ct:_="" ma:_="" ma:contentTypeName="Document" ma:contentTypeID="0x0101003E9CE079615D884A940FCB6663749814" ma:contentTypeVersion="12" ma:contentTypeDescription="Create a new document." ma:contentTypeScope="" ma:versionID="730a3498471033da2349798728f12144">
   <xsd:schema xmlns:xsd="http://www.w3.org/2001/XMLSchema" xmlns:xs="http://www.w3.org/2001/XMLSchema" xmlns:p="http://schemas.microsoft.com/office/2006/metadata/properties" xmlns:ns3="c224ffea-49cd-4700-9eee-e6fd160cd816" xmlns:ns4="d543374b-509c-4350-a5c8-3c1bd8055ec5" targetNamespace="http://schemas.microsoft.com/office/2006/metadata/properties" ma:root="true" ma:fieldsID="8e3cb5a327f01176a942c93285e0e7f8" ns3:_="" ns4:_="">
     <xsd:import namespace="c224ffea-49cd-4700-9eee-e6fd160cd816"/>
@@ -12085,6 +12132,15 @@
 </ct:contentTypeSchema>
 </file>
 
+<file path=customXml/item3.xml><?xml version="1.0" encoding="utf-8"?>
+<?mso-contentType ?>
+<FormTemplates xmlns="http://schemas.microsoft.com/sharepoint/v3/contenttype/forms">
+  <Display>DocumentLibraryForm</Display>
+  <Edit>DocumentLibraryForm</Edit>
+  <New>DocumentLibraryForm</New>
+</FormTemplates>
+</file>
+
 <file path=customXml/itemProps1.xml><?xml version="1.0" encoding="utf-8"?>
 <ds:datastoreItem xmlns:ds="http://schemas.openxmlformats.org/officeDocument/2006/customXml" ds:itemID="{F10E3395-82EA-4C3E-97EF-88C74BF5F12D}">
   <ds:schemaRefs>
@@ -12103,14 +12159,6 @@
 </file>
 
 <file path=customXml/itemProps2.xml><?xml version="1.0" encoding="utf-8"?>
-<ds:datastoreItem xmlns:ds="http://schemas.openxmlformats.org/officeDocument/2006/customXml" ds:itemID="{356A7A6B-3949-4E1B-BAB3-FDC63B06C8ED}">
-  <ds:schemaRefs>
-    <ds:schemaRef ds:uri="http://schemas.microsoft.com/sharepoint/v3/contenttype/forms"/>
-  </ds:schemaRefs>
-</ds:datastoreItem>
-</file>
-
-<file path=customXml/itemProps3.xml><?xml version="1.0" encoding="utf-8"?>
 <ds:datastoreItem xmlns:ds="http://schemas.openxmlformats.org/officeDocument/2006/customXml" ds:itemID="{4694CC2E-81AE-412E-A18E-BB25285B17C3}">
   <ds:schemaRefs>
     <ds:schemaRef ds:uri="http://schemas.microsoft.com/office/2006/metadata/contentType"/>
@@ -12127,4 +12175,12 @@
     <ds:schemaRef ds:uri="http://schemas.microsoft.com/internal/obd"/>
   </ds:schemaRefs>
 </ds:datastoreItem>
+</file>
+
+<file path=customXml/itemProps3.xml><?xml version="1.0" encoding="utf-8"?>
+<ds:datastoreItem xmlns:ds="http://schemas.openxmlformats.org/officeDocument/2006/customXml" ds:itemID="{356A7A6B-3949-4E1B-BAB3-FDC63B06C8ED}">
+  <ds:schemaRefs>
+    <ds:schemaRef ds:uri="http://schemas.microsoft.com/sharepoint/v3/contenttype/forms"/>
+  </ds:schemaRefs>
+</ds:datastoreItem>
 </file>
--- a/VillariWilliam1000045058.pptx
+++ b/VillariWilliam1000045058.pptx
@@ -498,7 +498,7 @@
           <a:p>
             <a:fld id="{D9A03290-C39D-45B6-9EA8-560DDA0656D7}" type="datetimeFigureOut">
               <a:rPr lang="it-IT" smtClean="0"/>
-              <a:t>16/07/2026</a:t>
+              <a:t>21/07/26</a:t>
             </a:fld>
             <a:endParaRPr lang="it-IT"/>
           </a:p>
@@ -656,7 +656,7 @@
           <a:p>
             <a:fld id="{D16CFFA4-1ED0-45A1-A0B5-5E99393A0C12}" type="slidenum">
               <a:rPr lang="it-IT" smtClean="0"/>
-              <a:t>‹#›</a:t>
+              <a:t>‹N›</a:t>
             </a:fld>
             <a:endParaRPr lang="it-IT"/>
           </a:p>
@@ -10155,7 +10155,7 @@
           <a:p>
             <a:r>
               <a:rPr lang="it-IT" sz="1600" dirty="0"/>
-              <a:t>Correlatore: Prof. </a:t>
+              <a:t>Correlatori: Prof. </a:t>
             </a:r>
             <a:r>
               <a:rPr lang="it-IT" sz="1600" b="1" dirty="0"/>
@@ -10165,7 +10165,7 @@
           <a:p>
             <a:r>
               <a:rPr lang="it-IT" sz="1600" dirty="0"/>
-              <a:t>Correlatrice: Ing. </a:t>
+              <a:t>	  Ing. </a:t>
             </a:r>
             <a:r>
               <a:rPr lang="it-IT" sz="1600" b="1" dirty="0"/>
@@ -11910,12 +11910,6 @@
 </file>
 
 <file path=customXml/item1.xml><?xml version="1.0" encoding="utf-8"?>
-<p:properties xmlns:p="http://schemas.microsoft.com/office/2006/metadata/properties" xmlns:xsi="http://www.w3.org/2001/XMLSchema-instance" xmlns:pc="http://schemas.microsoft.com/office/infopath/2007/PartnerControls">
-  <documentManagement/>
-</p:properties>
-</file>
-
-<file path=customXml/item2.xml><?xml version="1.0" encoding="utf-8"?>
 <ct:contentTypeSchema xmlns:ct="http://schemas.microsoft.com/office/2006/metadata/contentType" xmlns:ma="http://schemas.microsoft.com/office/2006/metadata/properties/metaAttributes" ct:_="" ma:_="" ma:contentTypeName="Document" ma:contentTypeID="0x0101003E9CE079615D884A940FCB6663749814" ma:contentTypeVersion="12" ma:contentTypeDescription="Create a new document." ma:contentTypeScope="" ma:versionID="730a3498471033da2349798728f12144">
   <xsd:schema xmlns:xsd="http://www.w3.org/2001/XMLSchema" xmlns:xs="http://www.w3.org/2001/XMLSchema" xmlns:p="http://schemas.microsoft.com/office/2006/metadata/properties" xmlns:ns3="c224ffea-49cd-4700-9eee-e6fd160cd816" xmlns:ns4="d543374b-509c-4350-a5c8-3c1bd8055ec5" targetNamespace="http://schemas.microsoft.com/office/2006/metadata/properties" ma:root="true" ma:fieldsID="8e3cb5a327f01176a942c93285e0e7f8" ns3:_="" ns4:_="">
     <xsd:import namespace="c224ffea-49cd-4700-9eee-e6fd160cd816"/>
@@ -12132,6 +12126,12 @@
 </ct:contentTypeSchema>
 </file>
 
+<file path=customXml/item2.xml><?xml version="1.0" encoding="utf-8"?>
+<p:properties xmlns:p="http://schemas.microsoft.com/office/2006/metadata/properties" xmlns:xsi="http://www.w3.org/2001/XMLSchema-instance" xmlns:pc="http://schemas.microsoft.com/office/infopath/2007/PartnerControls">
+  <documentManagement/>
+</p:properties>
+</file>
+
 <file path=customXml/item3.xml><?xml version="1.0" encoding="utf-8"?>
 <?mso-contentType ?>
 <FormTemplates xmlns="http://schemas.microsoft.com/sharepoint/v3/contenttype/forms">
@@ -12142,23 +12142,6 @@
 </file>
 
 <file path=customXml/itemProps1.xml><?xml version="1.0" encoding="utf-8"?>
-<ds:datastoreItem xmlns:ds="http://schemas.openxmlformats.org/officeDocument/2006/customXml" ds:itemID="{F10E3395-82EA-4C3E-97EF-88C74BF5F12D}">
-  <ds:schemaRefs>
-    <ds:schemaRef ds:uri="http://purl.org/dc/dcmitype/"/>
-    <ds:schemaRef ds:uri="http://schemas.microsoft.com/office/2006/metadata/properties"/>
-    <ds:schemaRef ds:uri="http://schemas.microsoft.com/office/2006/documentManagement/types"/>
-    <ds:schemaRef ds:uri="http://purl.org/dc/terms/"/>
-    <ds:schemaRef ds:uri="http://purl.org/dc/elements/1.1/"/>
-    <ds:schemaRef ds:uri="http://schemas.microsoft.com/office/infopath/2007/PartnerControls"/>
-    <ds:schemaRef ds:uri="d543374b-509c-4350-a5c8-3c1bd8055ec5"/>
-    <ds:schemaRef ds:uri="http://schemas.openxmlformats.org/package/2006/metadata/core-properties"/>
-    <ds:schemaRef ds:uri="c224ffea-49cd-4700-9eee-e6fd160cd816"/>
-    <ds:schemaRef ds:uri="http://www.w3.org/XML/1998/namespace"/>
-  </ds:schemaRefs>
-</ds:datastoreItem>
-</file>
-
-<file path=customXml/itemProps2.xml><?xml version="1.0" encoding="utf-8"?>
 <ds:datastoreItem xmlns:ds="http://schemas.openxmlformats.org/officeDocument/2006/customXml" ds:itemID="{4694CC2E-81AE-412E-A18E-BB25285B17C3}">
   <ds:schemaRefs>
     <ds:schemaRef ds:uri="http://schemas.microsoft.com/office/2006/metadata/contentType"/>
@@ -12177,6 +12160,23 @@
 </ds:datastoreItem>
 </file>
 
+<file path=customXml/itemProps2.xml><?xml version="1.0" encoding="utf-8"?>
+<ds:datastoreItem xmlns:ds="http://schemas.openxmlformats.org/officeDocument/2006/customXml" ds:itemID="{F10E3395-82EA-4C3E-97EF-88C74BF5F12D}">
+  <ds:schemaRefs>
+    <ds:schemaRef ds:uri="http://purl.org/dc/dcmitype/"/>
+    <ds:schemaRef ds:uri="http://schemas.microsoft.com/office/2006/metadata/properties"/>
+    <ds:schemaRef ds:uri="http://schemas.microsoft.com/office/2006/documentManagement/types"/>
+    <ds:schemaRef ds:uri="http://purl.org/dc/terms/"/>
+    <ds:schemaRef ds:uri="http://purl.org/dc/elements/1.1/"/>
+    <ds:schemaRef ds:uri="http://schemas.microsoft.com/office/infopath/2007/PartnerControls"/>
+    <ds:schemaRef ds:uri="d543374b-509c-4350-a5c8-3c1bd8055ec5"/>
+    <ds:schemaRef ds:uri="http://schemas.openxmlformats.org/package/2006/metadata/core-properties"/>
+    <ds:schemaRef ds:uri="c224ffea-49cd-4700-9eee-e6fd160cd816"/>
+    <ds:schemaRef ds:uri="http://www.w3.org/XML/1998/namespace"/>
+  </ds:schemaRefs>
+</ds:datastoreItem>
+</file>
+
 <file path=customXml/itemProps3.xml><?xml version="1.0" encoding="utf-8"?>
 <ds:datastoreItem xmlns:ds="http://schemas.openxmlformats.org/officeDocument/2006/customXml" ds:itemID="{356A7A6B-3949-4E1B-BAB3-FDC63B06C8ED}">
   <ds:schemaRefs>

--- a/VillariWilliam1000045058.pptx
+++ b/VillariWilliam1000045058.pptx
@@ -11910,6 +11910,21 @@
 </file>
 
 <file path=customXml/item1.xml><?xml version="1.0" encoding="utf-8"?>
+<?mso-contentType ?>
+<FormTemplates xmlns="http://schemas.microsoft.com/sharepoint/v3/contenttype/forms">
+  <Display>DocumentLibraryForm</Display>
+  <Edit>DocumentLibraryForm</Edit>
+  <New>DocumentLibraryForm</New>
+</FormTemplates>
+</file>
+
+<file path=customXml/item2.xml><?xml version="1.0" encoding="utf-8"?>
+<p:properties xmlns:p="http://schemas.microsoft.com/office/2006/metadata/properties" xmlns:xsi="http://www.w3.org/2001/XMLSchema-instance" xmlns:pc="http://schemas.microsoft.com/office/infopath/2007/PartnerControls">
+  <documentManagement/>
+</p:properties>
+</file>
+
+<file path=customXml/item3.xml><?xml version="1.0" encoding="utf-8"?>
 <ct:contentTypeSchema xmlns:ct="http://schemas.microsoft.com/office/2006/metadata/contentType" xmlns:ma="http://schemas.microsoft.com/office/2006/metadata/properties/metaAttributes" ct:_="" ma:_="" ma:contentTypeName="Document" ma:contentTypeID="0x0101003E9CE079615D884A940FCB6663749814" ma:contentTypeVersion="12" ma:contentTypeDescription="Create a new document." ma:contentTypeScope="" ma:versionID="730a3498471033da2349798728f12144">
   <xsd:schema xmlns:xsd="http://www.w3.org/2001/XMLSchema" xmlns:xs="http://www.w3.org/2001/XMLSchema" xmlns:p="http://schemas.microsoft.com/office/2006/metadata/properties" xmlns:ns3="c224ffea-49cd-4700-9eee-e6fd160cd816" xmlns:ns4="d543374b-509c-4350-a5c8-3c1bd8055ec5" targetNamespace="http://schemas.microsoft.com/office/2006/metadata/properties" ma:root="true" ma:fieldsID="8e3cb5a327f01176a942c93285e0e7f8" ns3:_="" ns4:_="">
     <xsd:import namespace="c224ffea-49cd-4700-9eee-e6fd160cd816"/>
@@ -12126,36 +12141,10 @@
 </ct:contentTypeSchema>
 </file>
 
-<file path=customXml/item2.xml><?xml version="1.0" encoding="utf-8"?>
-<p:properties xmlns:p="http://schemas.microsoft.com/office/2006/metadata/properties" xmlns:xsi="http://www.w3.org/2001/XMLSchema-instance" xmlns:pc="http://schemas.microsoft.com/office/infopath/2007/PartnerControls">
-  <documentManagement/>
-</p:properties>
-</file>
-
-<file path=customXml/item3.xml><?xml version="1.0" encoding="utf-8"?>
-<?mso-contentType ?>
-<FormTemplates xmlns="http://schemas.microsoft.com/sharepoint/v3/contenttype/forms">
-  <Display>DocumentLibraryForm</Display>
-  <Edit>DocumentLibraryForm</Edit>
-  <New>DocumentLibraryForm</New>
-</FormTemplates>
-</file>
-
 <file path=customXml/itemProps1.xml><?xml version="1.0" encoding="utf-8"?>
-<ds:datastoreItem xmlns:ds="http://schemas.openxmlformats.org/officeDocument/2006/customXml" ds:itemID="{4694CC2E-81AE-412E-A18E-BB25285B17C3}">
+<ds:datastoreItem xmlns:ds="http://schemas.openxmlformats.org/officeDocument/2006/customXml" ds:itemID="{356A7A6B-3949-4E1B-BAB3-FDC63B06C8ED}">
   <ds:schemaRefs>
-    <ds:schemaRef ds:uri="http://schemas.microsoft.com/office/2006/metadata/contentType"/>
-    <ds:schemaRef ds:uri="http://schemas.microsoft.com/office/2006/metadata/properties/metaAttributes"/>
-    <ds:schemaRef ds:uri="http://www.w3.org/2001/XMLSchema"/>
-    <ds:schemaRef ds:uri="http://schemas.microsoft.com/office/2006/metadata/properties"/>
-    <ds:schemaRef ds:uri="c224ffea-49cd-4700-9eee-e6fd160cd816"/>
-    <ds:schemaRef ds:uri="d543374b-509c-4350-a5c8-3c1bd8055ec5"/>
-    <ds:schemaRef ds:uri="http://schemas.microsoft.com/office/2006/documentManagement/types"/>
-    <ds:schemaRef ds:uri="http://schemas.microsoft.com/office/infopath/2007/PartnerControls"/>
-    <ds:schemaRef ds:uri="http://schemas.openxmlformats.org/package/2006/metadata/core-properties"/>
-    <ds:schemaRef ds:uri="http://purl.org/dc/elements/1.1/"/>
-    <ds:schemaRef ds:uri="http://purl.org/dc/terms/"/>
-    <ds:schemaRef ds:uri="http://schemas.microsoft.com/internal/obd"/>
+    <ds:schemaRef ds:uri="http://schemas.microsoft.com/sharepoint/v3/contenttype/forms"/>
   </ds:schemaRefs>
 </ds:datastoreItem>
 </file>
@@ -12178,9 +12167,20 @@
 </file>
 
 <file path=customXml/itemProps3.xml><?xml version="1.0" encoding="utf-8"?>
-<ds:datastoreItem xmlns:ds="http://schemas.openxmlformats.org/officeDocument/2006/customXml" ds:itemID="{356A7A6B-3949-4E1B-BAB3-FDC63B06C8ED}">
+<ds:datastoreItem xmlns:ds="http://schemas.openxmlformats.org/officeDocument/2006/customXml" ds:itemID="{4694CC2E-81AE-412E-A18E-BB25285B17C3}">
   <ds:schemaRefs>
-    <ds:schemaRef ds:uri="http://schemas.microsoft.com/sharepoint/v3/contenttype/forms"/>
+    <ds:schemaRef ds:uri="http://schemas.microsoft.com/office/2006/metadata/contentType"/>
+    <ds:schemaRef ds:uri="http://schemas.microsoft.com/office/2006/metadata/properties/metaAttributes"/>
+    <ds:schemaRef ds:uri="http://www.w3.org/2001/XMLSchema"/>
+    <ds:schemaRef ds:uri="http://schemas.microsoft.com/office/2006/metadata/properties"/>
+    <ds:schemaRef ds:uri="c224ffea-49cd-4700-9eee-e6fd160cd816"/>
+    <ds:schemaRef ds:uri="d543374b-509c-4350-a5c8-3c1bd8055ec5"/>
+    <ds:schemaRef ds:uri="http://schemas.microsoft.com/office/2006/documentManagement/types"/>
+    <ds:schemaRef ds:uri="http://schemas.microsoft.com/office/infopath/2007/PartnerControls"/>
+    <ds:schemaRef ds:uri="http://schemas.openxmlformats.org/package/2006/metadata/core-properties"/>
+    <ds:schemaRef ds:uri="http://purl.org/dc/elements/1.1/"/>
+    <ds:schemaRef ds:uri="http://purl.org/dc/terms/"/>
+    <ds:schemaRef ds:uri="http://schemas.microsoft.com/internal/obd"/>
   </ds:schemaRefs>
 </ds:datastoreItem>
 </file>